--- a/WEB-приложение «PDF-упаковщик».pptx
+++ b/WEB-приложение «PDF-упаковщик».pptx
@@ -109,6 +109,11 @@
       </a:defRPr>
     </a:lvl9pPr>
   </p:defaultTextStyle>
+  <p:extLst>
+    <p:ext uri="{EFAFB233-063F-42B5-8137-9DF3F51BA10A}">
+      <p15:sldGuideLst xmlns:p15="http://schemas.microsoft.com/office/powerpoint/2012/main"/>
+    </p:ext>
+  </p:extLst>
 </p:presentation>
 </file>
 
@@ -5891,7 +5896,12 @@
             <p:ph type="title"/>
           </p:nvPr>
         </p:nvSpPr>
-        <p:spPr/>
+        <p:spPr>
+          <a:xfrm>
+            <a:off x="677334" y="588759"/>
+            <a:ext cx="8596668" cy="1320800"/>
+          </a:xfrm>
+        </p:spPr>
         <p:txBody>
           <a:bodyPr/>
           <a:lstStyle/>
@@ -6276,7 +6286,7 @@
         </p:blipFill>
         <p:spPr bwMode="auto">
           <a:xfrm>
-            <a:off x="6729273" y="1930400"/>
+            <a:off x="6618591" y="581268"/>
             <a:ext cx="5310822" cy="3200111"/>
           </a:xfrm>
           <a:prstGeom prst="rect">
@@ -6292,6 +6302,66 @@
               </a14:hiddenFill>
             </a:ext>
           </a:extLst>
+        </p:spPr>
+      </p:pic>
+      <p:pic>
+        <p:nvPicPr>
+          <p:cNvPr id="5" name="Рисунок 4">
+            <a:extLst>
+              <a:ext uri="{FF2B5EF4-FFF2-40B4-BE49-F238E27FC236}">
+                <a16:creationId xmlns:a16="http://schemas.microsoft.com/office/drawing/2014/main" id="{57E31B29-0FF0-6EB2-C51E-2212622CE72E}"/>
+              </a:ext>
+            </a:extLst>
+          </p:cNvPr>
+          <p:cNvPicPr>
+            <a:picLocks noChangeAspect="1"/>
+          </p:cNvPicPr>
+          <p:nvPr/>
+        </p:nvPicPr>
+        <p:blipFill>
+          <a:blip r:embed="rId3"/>
+          <a:stretch>
+            <a:fillRect/>
+          </a:stretch>
+        </p:blipFill>
+        <p:spPr>
+          <a:xfrm>
+            <a:off x="6618591" y="4503841"/>
+            <a:ext cx="2657268" cy="1513230"/>
+          </a:xfrm>
+          <a:prstGeom prst="rect">
+            <a:avLst/>
+          </a:prstGeom>
+        </p:spPr>
+      </p:pic>
+      <p:pic>
+        <p:nvPicPr>
+          <p:cNvPr id="7" name="Рисунок 6">
+            <a:extLst>
+              <a:ext uri="{FF2B5EF4-FFF2-40B4-BE49-F238E27FC236}">
+                <a16:creationId xmlns:a16="http://schemas.microsoft.com/office/drawing/2014/main" id="{D828AACC-9217-F760-72D5-5F94A88BDBE2}"/>
+              </a:ext>
+            </a:extLst>
+          </p:cNvPr>
+          <p:cNvPicPr>
+            <a:picLocks noChangeAspect="1"/>
+          </p:cNvPicPr>
+          <p:nvPr/>
+        </p:nvPicPr>
+        <p:blipFill>
+          <a:blip r:embed="rId4"/>
+          <a:stretch>
+            <a:fillRect/>
+          </a:stretch>
+        </p:blipFill>
+        <p:spPr>
+          <a:xfrm>
+            <a:off x="9841762" y="4244180"/>
+            <a:ext cx="2087651" cy="2032552"/>
+          </a:xfrm>
+          <a:prstGeom prst="rect">
+            <a:avLst/>
+          </a:prstGeom>
         </p:spPr>
       </p:pic>
     </p:spTree>
